--- a/index/designs/y8-l14/l4-my-own-room/l4-my-own-room.pptx
+++ b/index/designs/y8-l14/l4-my-own-room/l4-my-own-room.pptx
@@ -2894,8 +2894,8 @@
         </p:nvSpPr>
         <p:spPr>
           <a:xfrm>
-            <a:off x="507950" y="180975"/>
-            <a:ext cx="1086618" cy="171450"/>
+            <a:off x="507950" y="176213"/>
+            <a:ext cx="1204267" cy="180975"/>
           </a:xfrm>
           <a:prstGeom prst="rect">
             <a:avLst/>
@@ -2933,8 +2933,8 @@
         </p:nvSpPr>
         <p:spPr>
           <a:xfrm>
-            <a:off x="1858714" y="166688"/>
-            <a:ext cx="967451" cy="200025"/>
+            <a:off x="1974056" y="166688"/>
+            <a:ext cx="1046390" cy="200025"/>
           </a:xfrm>
           <a:prstGeom prst="rect">
             <a:avLst/>
@@ -2972,8 +2972,8 @@
         </p:nvSpPr>
         <p:spPr>
           <a:xfrm>
-            <a:off x="11322397" y="180975"/>
-            <a:ext cx="368885" cy="171450"/>
+            <a:off x="11291888" y="176213"/>
+            <a:ext cx="400005" cy="180975"/>
           </a:xfrm>
           <a:prstGeom prst="rect">
             <a:avLst/>
@@ -3782,8 +3782,8 @@
         </p:nvSpPr>
         <p:spPr>
           <a:xfrm>
-            <a:off x="507950" y="176213"/>
-            <a:ext cx="1371404" cy="180975"/>
+            <a:off x="507950" y="180975"/>
+            <a:ext cx="1264837" cy="171450"/>
           </a:xfrm>
           <a:prstGeom prst="rect">
             <a:avLst/>
@@ -3821,8 +3821,8 @@
         </p:nvSpPr>
         <p:spPr>
           <a:xfrm>
-            <a:off x="2137916" y="166688"/>
-            <a:ext cx="1379753" cy="200025"/>
+            <a:off x="2033439" y="166688"/>
+            <a:ext cx="1288215" cy="200025"/>
           </a:xfrm>
           <a:prstGeom prst="rect">
             <a:avLst/>
@@ -3860,8 +3860,8 @@
         </p:nvSpPr>
         <p:spPr>
           <a:xfrm>
-            <a:off x="11234142" y="176213"/>
-            <a:ext cx="458906" cy="180975"/>
+            <a:off x="11244709" y="180975"/>
+            <a:ext cx="448127" cy="171450"/>
           </a:xfrm>
           <a:prstGeom prst="rect">
             <a:avLst/>
@@ -3929,7 +3929,7 @@
         </p:nvSpPr>
         <p:spPr>
           <a:xfrm>
-            <a:off x="609600" y="1065609"/>
+            <a:off x="609600" y="1051322"/>
             <a:ext cx="11192256" cy="200025"/>
           </a:xfrm>
           <a:prstGeom prst="rect">
@@ -3968,12 +3968,12 @@
         </p:nvSpPr>
         <p:spPr>
           <a:xfrm>
-            <a:off x="609600" y="1392585"/>
-            <a:ext cx="2031950" cy="1212652"/>
+            <a:off x="609600" y="1378297"/>
+            <a:ext cx="2031950" cy="1222177"/>
           </a:xfrm>
           <a:prstGeom prst="roundRect">
             <a:avLst>
-              <a:gd name="adj" fmla="val 9426"/>
+              <a:gd name="adj" fmla="val 9352"/>
             </a:avLst>
           </a:prstGeom>
           <a:solidFill>
@@ -4004,8 +4004,8 @@
         </p:nvSpPr>
         <p:spPr>
           <a:xfrm>
-            <a:off x="728485" y="1732211"/>
-            <a:ext cx="1794180" cy="533400"/>
+            <a:off x="728485" y="1717923"/>
+            <a:ext cx="1794180" cy="542925"/>
           </a:xfrm>
           <a:prstGeom prst="rect">
             <a:avLst/>
@@ -4043,12 +4043,12 @@
         </p:nvSpPr>
         <p:spPr>
           <a:xfrm>
-            <a:off x="2844701" y="1392585"/>
-            <a:ext cx="2032099" cy="1212652"/>
+            <a:off x="2844701" y="1378297"/>
+            <a:ext cx="2032099" cy="1222177"/>
           </a:xfrm>
           <a:prstGeom prst="roundRect">
             <a:avLst>
-              <a:gd name="adj" fmla="val 9426"/>
+              <a:gd name="adj" fmla="val 9352"/>
             </a:avLst>
           </a:prstGeom>
           <a:solidFill>
@@ -4079,8 +4079,8 @@
         </p:nvSpPr>
         <p:spPr>
           <a:xfrm>
-            <a:off x="2963585" y="1732211"/>
-            <a:ext cx="1794331" cy="533400"/>
+            <a:off x="2963585" y="1717923"/>
+            <a:ext cx="1794331" cy="542925"/>
           </a:xfrm>
           <a:prstGeom prst="rect">
             <a:avLst/>
@@ -4118,12 +4118,12 @@
         </p:nvSpPr>
         <p:spPr>
           <a:xfrm>
-            <a:off x="5079950" y="1392585"/>
-            <a:ext cx="2031950" cy="1212652"/>
+            <a:off x="5079950" y="1378297"/>
+            <a:ext cx="2031950" cy="1222177"/>
           </a:xfrm>
           <a:prstGeom prst="roundRect">
             <a:avLst>
-              <a:gd name="adj" fmla="val 9426"/>
+              <a:gd name="adj" fmla="val 9352"/>
             </a:avLst>
           </a:prstGeom>
           <a:solidFill>
@@ -4154,8 +4154,8 @@
         </p:nvSpPr>
         <p:spPr>
           <a:xfrm>
-            <a:off x="5198836" y="1732211"/>
-            <a:ext cx="1794180" cy="533400"/>
+            <a:off x="5198836" y="1717923"/>
+            <a:ext cx="1794180" cy="542925"/>
           </a:xfrm>
           <a:prstGeom prst="rect">
             <a:avLst/>
@@ -4193,12 +4193,12 @@
         </p:nvSpPr>
         <p:spPr>
           <a:xfrm>
-            <a:off x="7315051" y="1392585"/>
-            <a:ext cx="2032099" cy="1212652"/>
+            <a:off x="7315051" y="1378297"/>
+            <a:ext cx="2032099" cy="1222177"/>
           </a:xfrm>
           <a:prstGeom prst="roundRect">
             <a:avLst>
-              <a:gd name="adj" fmla="val 9426"/>
+              <a:gd name="adj" fmla="val 9352"/>
             </a:avLst>
           </a:prstGeom>
           <a:solidFill>
@@ -4229,8 +4229,8 @@
         </p:nvSpPr>
         <p:spPr>
           <a:xfrm>
-            <a:off x="7433935" y="1732211"/>
-            <a:ext cx="1794331" cy="533400"/>
+            <a:off x="7433935" y="1717923"/>
+            <a:ext cx="1794331" cy="542925"/>
           </a:xfrm>
           <a:prstGeom prst="rect">
             <a:avLst/>
@@ -4268,12 +4268,12 @@
         </p:nvSpPr>
         <p:spPr>
           <a:xfrm>
-            <a:off x="9550301" y="1392585"/>
-            <a:ext cx="2031950" cy="1212652"/>
+            <a:off x="9550301" y="1378297"/>
+            <a:ext cx="2031950" cy="1222177"/>
           </a:xfrm>
           <a:prstGeom prst="roundRect">
             <a:avLst>
-              <a:gd name="adj" fmla="val 9426"/>
+              <a:gd name="adj" fmla="val 9352"/>
             </a:avLst>
           </a:prstGeom>
           <a:solidFill>
@@ -4304,8 +4304,8 @@
         </p:nvSpPr>
         <p:spPr>
           <a:xfrm>
-            <a:off x="9669186" y="1732211"/>
-            <a:ext cx="1794180" cy="533400"/>
+            <a:off x="9669186" y="1717923"/>
+            <a:ext cx="1794180" cy="542925"/>
           </a:xfrm>
           <a:prstGeom prst="rect">
             <a:avLst/>
@@ -4343,12 +4343,12 @@
         </p:nvSpPr>
         <p:spPr>
           <a:xfrm>
-            <a:off x="609600" y="2808387"/>
-            <a:ext cx="2031950" cy="1212652"/>
+            <a:off x="609600" y="2803624"/>
+            <a:ext cx="2031950" cy="1222177"/>
           </a:xfrm>
           <a:prstGeom prst="roundRect">
             <a:avLst>
-              <a:gd name="adj" fmla="val 9426"/>
+              <a:gd name="adj" fmla="val 9352"/>
             </a:avLst>
           </a:prstGeom>
           <a:solidFill>
@@ -4379,8 +4379,8 @@
         </p:nvSpPr>
         <p:spPr>
           <a:xfrm>
-            <a:off x="728485" y="3148013"/>
-            <a:ext cx="1794180" cy="533400"/>
+            <a:off x="728485" y="3143250"/>
+            <a:ext cx="1794180" cy="542925"/>
           </a:xfrm>
           <a:prstGeom prst="rect">
             <a:avLst/>
@@ -4418,12 +4418,12 @@
         </p:nvSpPr>
         <p:spPr>
           <a:xfrm>
-            <a:off x="2844701" y="2808387"/>
-            <a:ext cx="2032099" cy="1212652"/>
+            <a:off x="2844701" y="2803624"/>
+            <a:ext cx="2032099" cy="1222177"/>
           </a:xfrm>
           <a:prstGeom prst="roundRect">
             <a:avLst>
-              <a:gd name="adj" fmla="val 9426"/>
+              <a:gd name="adj" fmla="val 9352"/>
             </a:avLst>
           </a:prstGeom>
           <a:solidFill>
@@ -4454,8 +4454,8 @@
         </p:nvSpPr>
         <p:spPr>
           <a:xfrm>
-            <a:off x="2963585" y="3148013"/>
-            <a:ext cx="1794331" cy="533400"/>
+            <a:off x="2963585" y="3143250"/>
+            <a:ext cx="1794331" cy="542925"/>
           </a:xfrm>
           <a:prstGeom prst="rect">
             <a:avLst/>
@@ -4493,12 +4493,12 @@
         </p:nvSpPr>
         <p:spPr>
           <a:xfrm>
-            <a:off x="5079950" y="2808387"/>
-            <a:ext cx="2031950" cy="1212652"/>
+            <a:off x="5079950" y="2803624"/>
+            <a:ext cx="2031950" cy="1222177"/>
           </a:xfrm>
           <a:prstGeom prst="roundRect">
             <a:avLst>
-              <a:gd name="adj" fmla="val 9426"/>
+              <a:gd name="adj" fmla="val 9352"/>
             </a:avLst>
           </a:prstGeom>
           <a:solidFill>
@@ -4529,8 +4529,8 @@
         </p:nvSpPr>
         <p:spPr>
           <a:xfrm>
-            <a:off x="5198836" y="3148013"/>
-            <a:ext cx="1794180" cy="533400"/>
+            <a:off x="5198836" y="3143250"/>
+            <a:ext cx="1794180" cy="542925"/>
           </a:xfrm>
           <a:prstGeom prst="rect">
             <a:avLst/>
@@ -4568,12 +4568,12 @@
         </p:nvSpPr>
         <p:spPr>
           <a:xfrm>
-            <a:off x="7315051" y="2808387"/>
-            <a:ext cx="2032099" cy="1212652"/>
+            <a:off x="7315051" y="2803624"/>
+            <a:ext cx="2032099" cy="1222177"/>
           </a:xfrm>
           <a:prstGeom prst="roundRect">
             <a:avLst>
-              <a:gd name="adj" fmla="val 9426"/>
+              <a:gd name="adj" fmla="val 9352"/>
             </a:avLst>
           </a:prstGeom>
           <a:solidFill>
@@ -4604,8 +4604,8 @@
         </p:nvSpPr>
         <p:spPr>
           <a:xfrm>
-            <a:off x="7433935" y="3148013"/>
-            <a:ext cx="1794331" cy="533400"/>
+            <a:off x="7433935" y="3143250"/>
+            <a:ext cx="1794331" cy="542925"/>
           </a:xfrm>
           <a:prstGeom prst="rect">
             <a:avLst/>
@@ -4643,12 +4643,12 @@
         </p:nvSpPr>
         <p:spPr>
           <a:xfrm>
-            <a:off x="9550301" y="2808387"/>
-            <a:ext cx="2031950" cy="1212652"/>
+            <a:off x="9550301" y="2803624"/>
+            <a:ext cx="2031950" cy="1222177"/>
           </a:xfrm>
           <a:prstGeom prst="roundRect">
             <a:avLst>
-              <a:gd name="adj" fmla="val 9426"/>
+              <a:gd name="adj" fmla="val 9352"/>
             </a:avLst>
           </a:prstGeom>
           <a:solidFill>
@@ -4679,8 +4679,8 @@
         </p:nvSpPr>
         <p:spPr>
           <a:xfrm>
-            <a:off x="9669186" y="3148013"/>
-            <a:ext cx="1794180" cy="533400"/>
+            <a:off x="9669186" y="3143250"/>
+            <a:ext cx="1794180" cy="542925"/>
           </a:xfrm>
           <a:prstGeom prst="rect">
             <a:avLst/>
@@ -4718,12 +4718,12 @@
         </p:nvSpPr>
         <p:spPr>
           <a:xfrm>
-            <a:off x="609600" y="4224189"/>
-            <a:ext cx="2031950" cy="1212652"/>
+            <a:off x="609600" y="4228951"/>
+            <a:ext cx="2031950" cy="1222177"/>
           </a:xfrm>
           <a:prstGeom prst="roundRect">
             <a:avLst>
-              <a:gd name="adj" fmla="val 9426"/>
+              <a:gd name="adj" fmla="val 9352"/>
             </a:avLst>
           </a:prstGeom>
           <a:solidFill>
@@ -4754,8 +4754,8 @@
         </p:nvSpPr>
         <p:spPr>
           <a:xfrm>
-            <a:off x="728485" y="4563814"/>
-            <a:ext cx="1794180" cy="533400"/>
+            <a:off x="728485" y="4568577"/>
+            <a:ext cx="1794180" cy="542925"/>
           </a:xfrm>
           <a:prstGeom prst="rect">
             <a:avLst/>
@@ -4793,12 +4793,12 @@
         </p:nvSpPr>
         <p:spPr>
           <a:xfrm>
-            <a:off x="2844701" y="4224189"/>
-            <a:ext cx="2032099" cy="1212652"/>
+            <a:off x="2844701" y="4228951"/>
+            <a:ext cx="2032099" cy="1222177"/>
           </a:xfrm>
           <a:prstGeom prst="roundRect">
             <a:avLst>
-              <a:gd name="adj" fmla="val 9426"/>
+              <a:gd name="adj" fmla="val 9352"/>
             </a:avLst>
           </a:prstGeom>
           <a:solidFill>
@@ -4829,8 +4829,8 @@
         </p:nvSpPr>
         <p:spPr>
           <a:xfrm>
-            <a:off x="2963585" y="4563814"/>
-            <a:ext cx="1794331" cy="533400"/>
+            <a:off x="2963585" y="4568577"/>
+            <a:ext cx="1794331" cy="542925"/>
           </a:xfrm>
           <a:prstGeom prst="rect">
             <a:avLst/>
@@ -4868,12 +4868,12 @@
         </p:nvSpPr>
         <p:spPr>
           <a:xfrm>
-            <a:off x="5079950" y="4224189"/>
-            <a:ext cx="2031950" cy="1212652"/>
+            <a:off x="5079950" y="4228951"/>
+            <a:ext cx="2031950" cy="1222177"/>
           </a:xfrm>
           <a:prstGeom prst="roundRect">
             <a:avLst>
-              <a:gd name="adj" fmla="val 9426"/>
+              <a:gd name="adj" fmla="val 9352"/>
             </a:avLst>
           </a:prstGeom>
           <a:solidFill>
@@ -4904,8 +4904,8 @@
         </p:nvSpPr>
         <p:spPr>
           <a:xfrm>
-            <a:off x="5198836" y="4563814"/>
-            <a:ext cx="1794180" cy="533400"/>
+            <a:off x="5198836" y="4568577"/>
+            <a:ext cx="1794180" cy="542925"/>
           </a:xfrm>
           <a:prstGeom prst="rect">
             <a:avLst/>
@@ -4943,7 +4943,7 @@
         </p:nvSpPr>
         <p:spPr>
           <a:xfrm>
-            <a:off x="609600" y="5589240"/>
+            <a:off x="609600" y="5603528"/>
             <a:ext cx="11192256" cy="228600"/>
           </a:xfrm>
           <a:prstGeom prst="rect">
@@ -6179,8 +6179,8 @@
         </p:nvSpPr>
         <p:spPr>
           <a:xfrm>
-            <a:off x="507950" y="176213"/>
-            <a:ext cx="1371404" cy="180975"/>
+            <a:off x="507950" y="180975"/>
+            <a:ext cx="1264837" cy="171450"/>
           </a:xfrm>
           <a:prstGeom prst="rect">
             <a:avLst/>
@@ -6218,8 +6218,8 @@
         </p:nvSpPr>
         <p:spPr>
           <a:xfrm>
-            <a:off x="2137916" y="166688"/>
-            <a:ext cx="1191667" cy="200025"/>
+            <a:off x="2033439" y="166688"/>
+            <a:ext cx="1109844" cy="200025"/>
           </a:xfrm>
           <a:prstGeom prst="rect">
             <a:avLst/>
@@ -6257,8 +6257,8 @@
         </p:nvSpPr>
         <p:spPr>
           <a:xfrm>
-            <a:off x="11209288" y="176213"/>
-            <a:ext cx="484257" cy="180975"/>
+            <a:off x="11244709" y="180975"/>
+            <a:ext cx="448127" cy="171450"/>
           </a:xfrm>
           <a:prstGeom prst="rect">
             <a:avLst/>
@@ -8682,7 +8682,7 @@
       </p:sp>
       <p:pic>
         <p:nvPicPr>
-          <p:cNvPr id="10" name="Image 0" descr="/var/folders/6c/210dcgxn4gz5sm71vld2cy1h0000gn/T/tmp.emPkXuZ1Lq/img/shafa.png">    </p:cNvPr>
+          <p:cNvPr id="10" name="Image 0" descr="/var/folders/6c/210dcgxn4gz5sm71vld2cy1h0000gn/T/tmp.owmCEDjpXl/img/shafa.png">    </p:cNvPr>
           <p:cNvPicPr>
             <a:picLocks noChangeAspect="1"/>
           </p:cNvPicPr>
@@ -8781,7 +8781,7 @@
       </p:sp>
       <p:pic>
         <p:nvPicPr>
-          <p:cNvPr id="13" name="Image 1" descr="/var/folders/6c/210dcgxn4gz5sm71vld2cy1h0000gn/T/tmp.emPkXuZ1Lq/img/chaji.png">    </p:cNvPr>
+          <p:cNvPr id="13" name="Image 1" descr="/var/folders/6c/210dcgxn4gz5sm71vld2cy1h0000gn/T/tmp.owmCEDjpXl/img/chaji.png">    </p:cNvPr>
           <p:cNvPicPr>
             <a:picLocks noChangeAspect="1"/>
           </p:cNvPicPr>
@@ -8880,7 +8880,7 @@
       </p:sp>
       <p:pic>
         <p:nvPicPr>
-          <p:cNvPr id="16" name="Image 2" descr="/var/folders/6c/210dcgxn4gz5sm71vld2cy1h0000gn/T/tmp.emPkXuZ1Lq/img/dianshigui.png">    </p:cNvPr>
+          <p:cNvPr id="16" name="Image 2" descr="/var/folders/6c/210dcgxn4gz5sm71vld2cy1h0000gn/T/tmp.owmCEDjpXl/img/dianshigui.png">    </p:cNvPr>
           <p:cNvPicPr>
             <a:picLocks noChangeAspect="1"/>
           </p:cNvPicPr>
@@ -9054,7 +9054,7 @@
       </p:sp>
       <p:pic>
         <p:nvPicPr>
-          <p:cNvPr id="21" name="Image 3" descr="/var/folders/6c/210dcgxn4gz5sm71vld2cy1h0000gn/T/tmp.emPkXuZ1Lq/img/kongtiao.png">    </p:cNvPr>
+          <p:cNvPr id="21" name="Image 3" descr="/var/folders/6c/210dcgxn4gz5sm71vld2cy1h0000gn/T/tmp.owmCEDjpXl/img/kongtiao.png">    </p:cNvPr>
           <p:cNvPicPr>
             <a:picLocks noChangeAspect="1"/>
           </p:cNvPicPr>
@@ -9153,7 +9153,7 @@
       </p:sp>
       <p:pic>
         <p:nvPicPr>
-          <p:cNvPr id="24" name="Image 4" descr="/var/folders/6c/210dcgxn4gz5sm71vld2cy1h0000gn/T/tmp.emPkXuZ1Lq/img/xiyiji.png">    </p:cNvPr>
+          <p:cNvPr id="24" name="Image 4" descr="/var/folders/6c/210dcgxn4gz5sm71vld2cy1h0000gn/T/tmp.owmCEDjpXl/img/xiyiji.png">    </p:cNvPr>
           <p:cNvPicPr>
             <a:picLocks noChangeAspect="1"/>
           </p:cNvPicPr>
@@ -9252,7 +9252,7 @@
       </p:sp>
       <p:pic>
         <p:nvPicPr>
-          <p:cNvPr id="27" name="Image 5" descr="/var/folders/6c/210dcgxn4gz5sm71vld2cy1h0000gn/T/tmp.emPkXuZ1Lq/img/limian.png">    </p:cNvPr>
+          <p:cNvPr id="27" name="Image 5" descr="/var/folders/6c/210dcgxn4gz5sm71vld2cy1h0000gn/T/tmp.owmCEDjpXl/img/limian.png">    </p:cNvPr>
           <p:cNvPicPr>
             <a:picLocks noChangeAspect="1"/>
           </p:cNvPicPr>
@@ -9351,7 +9351,7 @@
       </p:sp>
       <p:pic>
         <p:nvPicPr>
-          <p:cNvPr id="30" name="Image 6" descr="/var/folders/6c/210dcgxn4gz5sm71vld2cy1h0000gn/T/tmp.emPkXuZ1Lq/img/bingxiang.png">    </p:cNvPr>
+          <p:cNvPr id="30" name="Image 6" descr="/var/folders/6c/210dcgxn4gz5sm71vld2cy1h0000gn/T/tmp.owmCEDjpXl/img/bingxiang.png">    </p:cNvPr>
           <p:cNvPicPr>
             <a:picLocks noChangeAspect="1"/>
           </p:cNvPicPr>
@@ -9450,7 +9450,7 @@
       </p:sp>
       <p:pic>
         <p:nvPicPr>
-          <p:cNvPr id="33" name="Image 7" descr="/var/folders/6c/210dcgxn4gz5sm71vld2cy1h0000gn/T/tmp.emPkXuZ1Lq/img/kaoxiang.png">    </p:cNvPr>
+          <p:cNvPr id="33" name="Image 7" descr="/var/folders/6c/210dcgxn4gz5sm71vld2cy1h0000gn/T/tmp.owmCEDjpXl/img/kaoxiang.png">    </p:cNvPr>
           <p:cNvPicPr>
             <a:picLocks noChangeAspect="1"/>
           </p:cNvPicPr>
@@ -9549,7 +9549,7 @@
       </p:sp>
       <p:pic>
         <p:nvPicPr>
-          <p:cNvPr id="36" name="Image 8" descr="/var/folders/6c/210dcgxn4gz5sm71vld2cy1h0000gn/T/tmp.emPkXuZ1Lq/img/dianlu.png">    </p:cNvPr>
+          <p:cNvPr id="36" name="Image 8" descr="/var/folders/6c/210dcgxn4gz5sm71vld2cy1h0000gn/T/tmp.owmCEDjpXl/img/dianlu.png">    </p:cNvPr>
           <p:cNvPicPr>
             <a:picLocks noChangeAspect="1"/>
           </p:cNvPicPr>
@@ -9648,7 +9648,7 @@
       </p:sp>
       <p:pic>
         <p:nvPicPr>
-          <p:cNvPr id="39" name="Image 9" descr="/var/folders/6c/210dcgxn4gz5sm71vld2cy1h0000gn/T/tmp.emPkXuZ1Lq/img/yizi.png">    </p:cNvPr>
+          <p:cNvPr id="39" name="Image 9" descr="/var/folders/6c/210dcgxn4gz5sm71vld2cy1h0000gn/T/tmp.owmCEDjpXl/img/yizi.png">    </p:cNvPr>
           <p:cNvPicPr>
             <a:picLocks noChangeAspect="1"/>
           </p:cNvPicPr>
@@ -9822,7 +9822,7 @@
       </p:sp>
       <p:pic>
         <p:nvPicPr>
-          <p:cNvPr id="44" name="Image 10" descr="/var/folders/6c/210dcgxn4gz5sm71vld2cy1h0000gn/T/tmp.emPkXuZ1Lq/img/shuzhuo.png">    </p:cNvPr>
+          <p:cNvPr id="44" name="Image 10" descr="/var/folders/6c/210dcgxn4gz5sm71vld2cy1h0000gn/T/tmp.owmCEDjpXl/img/shuzhuo.png">    </p:cNvPr>
           <p:cNvPicPr>
             <a:picLocks noChangeAspect="1"/>
           </p:cNvPicPr>
@@ -10201,7 +10201,7 @@
       </p:sp>
       <p:pic>
         <p:nvPicPr>
-          <p:cNvPr id="9" name="Image 0" descr="/var/folders/6c/210dcgxn4gz5sm71vld2cy1h0000gn/T/tmp.emPkXuZ1Lq/img/chuang.png">    </p:cNvPr>
+          <p:cNvPr id="9" name="Image 0" descr="/var/folders/6c/210dcgxn4gz5sm71vld2cy1h0000gn/T/tmp.owmCEDjpXl/img/chuang.png">    </p:cNvPr>
           <p:cNvPicPr>
             <a:picLocks noChangeAspect="1"/>
           </p:cNvPicPr>
@@ -16139,8 +16139,8 @@
         </p:nvSpPr>
         <p:spPr>
           <a:xfrm>
-            <a:off x="507950" y="180975"/>
-            <a:ext cx="1608826" cy="171450"/>
+            <a:off x="507950" y="176213"/>
+            <a:ext cx="1785830" cy="180975"/>
           </a:xfrm>
           <a:prstGeom prst="rect">
             <a:avLst/>
@@ -16178,8 +16178,8 @@
         </p:nvSpPr>
         <p:spPr>
           <a:xfrm>
-            <a:off x="2370683" y="166688"/>
-            <a:ext cx="910980" cy="200025"/>
+            <a:off x="2544217" y="166688"/>
+            <a:ext cx="983998" cy="200025"/>
           </a:xfrm>
           <a:prstGeom prst="rect">
             <a:avLst/>
@@ -16217,8 +16217,8 @@
         </p:nvSpPr>
         <p:spPr>
           <a:xfrm>
-            <a:off x="11244709" y="180975"/>
-            <a:ext cx="448127" cy="171450"/>
+            <a:off x="11184285" y="176213"/>
+            <a:ext cx="509760" cy="180975"/>
           </a:xfrm>
           <a:prstGeom prst="rect">
             <a:avLst/>
@@ -17796,7 +17796,7 @@
       </p:sp>
       <p:pic>
         <p:nvPicPr>
-          <p:cNvPr id="10" name="Image 0" descr="/var/folders/6c/210dcgxn4gz5sm71vld2cy1h0000gn/T/tmp.emPkXuZ1Lq/img/yizi.png">    </p:cNvPr>
+          <p:cNvPr id="10" name="Image 0" descr="/var/folders/6c/210dcgxn4gz5sm71vld2cy1h0000gn/T/tmp.owmCEDjpXl/img/yizi.png">    </p:cNvPr>
           <p:cNvPicPr>
             <a:picLocks noChangeAspect="1"/>
           </p:cNvPicPr>
@@ -17976,7 +17976,7 @@
       </p:sp>
       <p:pic>
         <p:nvPicPr>
-          <p:cNvPr id="15" name="Image 1" descr="/var/folders/6c/210dcgxn4gz5sm71vld2cy1h0000gn/T/tmp.emPkXuZ1Lq/img/ba.png">    </p:cNvPr>
+          <p:cNvPr id="15" name="Image 1" descr="/var/folders/6c/210dcgxn4gz5sm71vld2cy1h0000gn/T/tmp.owmCEDjpXl/img/ba.png">    </p:cNvPr>
           <p:cNvPicPr>
             <a:picLocks noChangeAspect="1"/>
           </p:cNvPicPr>
@@ -18211,8 +18211,8 @@
         </p:nvSpPr>
         <p:spPr>
           <a:xfrm>
-            <a:off x="507950" y="176213"/>
-            <a:ext cx="1371404" cy="180975"/>
+            <a:off x="507950" y="180975"/>
+            <a:ext cx="1264837" cy="171450"/>
           </a:xfrm>
           <a:prstGeom prst="rect">
             <a:avLst/>
@@ -18250,8 +18250,8 @@
         </p:nvSpPr>
         <p:spPr>
           <a:xfrm>
-            <a:off x="2137916" y="166688"/>
-            <a:ext cx="1448217" cy="200025"/>
+            <a:off x="2033439" y="166688"/>
+            <a:ext cx="1370796" cy="200025"/>
           </a:xfrm>
           <a:prstGeom prst="rect">
             <a:avLst/>
@@ -18289,8 +18289,8 @@
         </p:nvSpPr>
         <p:spPr>
           <a:xfrm>
-            <a:off x="11266736" y="176213"/>
-            <a:ext cx="425660" cy="180975"/>
+            <a:off x="11322397" y="180975"/>
+            <a:ext cx="368885" cy="171450"/>
           </a:xfrm>
           <a:prstGeom prst="rect">
             <a:avLst/>
@@ -18391,7 +18391,7 @@
       </p:sp>
       <p:pic>
         <p:nvPicPr>
-          <p:cNvPr id="9" name="Image 0" descr="/var/folders/6c/210dcgxn4gz5sm71vld2cy1h0000gn/T/tmp.emPkXuZ1Lq/img/ba.png">    </p:cNvPr>
+          <p:cNvPr id="9" name="Image 0" descr="/var/folders/6c/210dcgxn4gz5sm71vld2cy1h0000gn/T/tmp.owmCEDjpXl/img/ba.png">    </p:cNvPr>
           <p:cNvPicPr>
             <a:picLocks noChangeAspect="1"/>
           </p:cNvPicPr>
@@ -20212,7 +20212,7 @@
       </p:sp>
       <p:pic>
         <p:nvPicPr>
-          <p:cNvPr id="10" name="Image 0" descr="/var/folders/6c/210dcgxn4gz5sm71vld2cy1h0000gn/T/tmp.emPkXuZ1Lq/img/shuzhuo.png">    </p:cNvPr>
+          <p:cNvPr id="10" name="Image 0" descr="/var/folders/6c/210dcgxn4gz5sm71vld2cy1h0000gn/T/tmp.owmCEDjpXl/img/shuzhuo.png">    </p:cNvPr>
           <p:cNvPicPr>
             <a:picLocks noChangeAspect="1"/>
           </p:cNvPicPr>
